--- a/slide/themes/src/18_fluorite.pptx
+++ b/slide/themes/src/18_fluorite.pptx
@@ -2209,9 +2209,6 @@
                 <a:solidFill>
                   <a:schemeClr val="accent6"/>
                 </a:solidFill>
-                <a:latin typeface="Open Sans"/>
-                <a:ea typeface="Open Sans"/>
-                <a:cs typeface="Open Sans"/>
               </a:defRPr>
             </a:lvl1pPr>
             <a:lvl2pPr marL="457200" indent="0" algn="l">
@@ -2220,9 +2217,6 @@
                 <a:solidFill>
                   <a:schemeClr val="accent6"/>
                 </a:solidFill>
-                <a:latin typeface="Open Sans"/>
-                <a:ea typeface="Open Sans"/>
-                <a:cs typeface="Open Sans"/>
               </a:defRPr>
             </a:lvl2pPr>
             <a:lvl3pPr marL="914400" indent="0" algn="l">
@@ -2231,9 +2225,6 @@
                 <a:solidFill>
                   <a:schemeClr val="accent6"/>
                 </a:solidFill>
-                <a:latin typeface="Open Sans"/>
-                <a:ea typeface="Open Sans"/>
-                <a:cs typeface="Open Sans"/>
               </a:defRPr>
             </a:lvl3pPr>
             <a:lvl4pPr marL="1371600" indent="0" algn="l">
@@ -2242,9 +2233,6 @@
                 <a:solidFill>
                   <a:schemeClr val="accent6"/>
                 </a:solidFill>
-                <a:latin typeface="Open Sans"/>
-                <a:ea typeface="Open Sans"/>
-                <a:cs typeface="Open Sans"/>
               </a:defRPr>
             </a:lvl4pPr>
             <a:lvl5pPr marL="1828800" indent="0" algn="l">
@@ -2253,9 +2241,6 @@
                 <a:solidFill>
                   <a:schemeClr val="accent6"/>
                 </a:solidFill>
-                <a:latin typeface="Open Sans"/>
-                <a:ea typeface="Open Sans"/>
-                <a:cs typeface="Open Sans"/>
               </a:defRPr>
             </a:lvl5pPr>
             <a:lvl6pPr marL="2286000" indent="0" algn="l">
@@ -2264,9 +2249,6 @@
                 <a:solidFill>
                   <a:schemeClr val="accent6"/>
                 </a:solidFill>
-                <a:latin typeface="Open Sans"/>
-                <a:ea typeface="Open Sans"/>
-                <a:cs typeface="Open Sans"/>
               </a:defRPr>
             </a:lvl6pPr>
             <a:lvl7pPr marL="2743200" indent="0" algn="l">
@@ -2275,9 +2257,6 @@
                 <a:solidFill>
                   <a:schemeClr val="accent6"/>
                 </a:solidFill>
-                <a:latin typeface="Open Sans"/>
-                <a:ea typeface="Open Sans"/>
-                <a:cs typeface="Open Sans"/>
               </a:defRPr>
             </a:lvl7pPr>
             <a:lvl8pPr marL="3200400" indent="0" algn="l">
@@ -2286,9 +2265,6 @@
                 <a:solidFill>
                   <a:schemeClr val="accent6"/>
                 </a:solidFill>
-                <a:latin typeface="Open Sans"/>
-                <a:ea typeface="Open Sans"/>
-                <a:cs typeface="Open Sans"/>
               </a:defRPr>
             </a:lvl8pPr>
             <a:lvl9pPr marL="3657600" indent="0" algn="l">
@@ -2297,9 +2273,6 @@
                 <a:solidFill>
                   <a:schemeClr val="accent6"/>
                 </a:solidFill>
-                <a:latin typeface="Open Sans"/>
-                <a:ea typeface="Open Sans"/>
-                <a:cs typeface="Open Sans"/>
               </a:defRPr>
             </a:lvl9pPr>
           </a:lstStyle>
@@ -6749,9 +6722,6 @@
                 <a:solidFill>
                   <a:schemeClr val="accent6"/>
                 </a:solidFill>
-                <a:latin typeface="Open Sans"/>
-                <a:ea typeface="Open Sans"/>
-                <a:cs typeface="Open Sans"/>
               </a:defRPr>
             </a:lvl1pPr>
             <a:lvl2pPr marL="457200" indent="0">
@@ -13061,9 +13031,6 @@
                     <a:lumOff val="25000"/>
                   </a:schemeClr>
                 </a:solidFill>
-                <a:latin typeface="Arial Black"/>
-                <a:ea typeface="Arial Black"/>
-                <a:cs typeface="Arial Black"/>
               </a:defRPr>
             </a:lvl1pPr>
           </a:lstStyle>
@@ -13680,9 +13647,6 @@
                 <a:solidFill>
                   <a:schemeClr val="accent6"/>
                 </a:solidFill>
-                <a:latin typeface="Open Sans"/>
-                <a:ea typeface="Open Sans"/>
-                <a:cs typeface="Open Sans"/>
               </a:defRPr>
             </a:lvl1pPr>
             <a:lvl2pPr marL="457200" indent="0" algn="l">
@@ -13691,9 +13655,6 @@
                 <a:solidFill>
                   <a:schemeClr val="accent6"/>
                 </a:solidFill>
-                <a:latin typeface="Open Sans"/>
-                <a:ea typeface="Open Sans"/>
-                <a:cs typeface="Open Sans"/>
               </a:defRPr>
             </a:lvl2pPr>
             <a:lvl3pPr marL="914400" indent="0" algn="l">
@@ -13702,9 +13663,6 @@
                 <a:solidFill>
                   <a:schemeClr val="accent6"/>
                 </a:solidFill>
-                <a:latin typeface="Open Sans"/>
-                <a:ea typeface="Open Sans"/>
-                <a:cs typeface="Open Sans"/>
               </a:defRPr>
             </a:lvl3pPr>
             <a:lvl4pPr marL="1371600" indent="0" algn="l">
@@ -13713,9 +13671,6 @@
                 <a:solidFill>
                   <a:schemeClr val="accent6"/>
                 </a:solidFill>
-                <a:latin typeface="Open Sans"/>
-                <a:ea typeface="Open Sans"/>
-                <a:cs typeface="Open Sans"/>
               </a:defRPr>
             </a:lvl4pPr>
             <a:lvl5pPr marL="1828800" indent="0" algn="l">
@@ -13724,9 +13679,6 @@
                 <a:solidFill>
                   <a:schemeClr val="accent6"/>
                 </a:solidFill>
-                <a:latin typeface="Open Sans"/>
-                <a:ea typeface="Open Sans"/>
-                <a:cs typeface="Open Sans"/>
               </a:defRPr>
             </a:lvl5pPr>
             <a:lvl6pPr marL="2286000" indent="0" algn="l">
@@ -13735,9 +13687,6 @@
                 <a:solidFill>
                   <a:schemeClr val="accent6"/>
                 </a:solidFill>
-                <a:latin typeface="Open Sans"/>
-                <a:ea typeface="Open Sans"/>
-                <a:cs typeface="Open Sans"/>
               </a:defRPr>
             </a:lvl6pPr>
             <a:lvl7pPr marL="2743200" indent="0" algn="l">
@@ -13746,9 +13695,6 @@
                 <a:solidFill>
                   <a:schemeClr val="accent6"/>
                 </a:solidFill>
-                <a:latin typeface="Open Sans"/>
-                <a:ea typeface="Open Sans"/>
-                <a:cs typeface="Open Sans"/>
               </a:defRPr>
             </a:lvl7pPr>
             <a:lvl8pPr marL="3200400" indent="0" algn="l">
@@ -13757,9 +13703,6 @@
                 <a:solidFill>
                   <a:schemeClr val="accent6"/>
                 </a:solidFill>
-                <a:latin typeface="Open Sans"/>
-                <a:ea typeface="Open Sans"/>
-                <a:cs typeface="Open Sans"/>
               </a:defRPr>
             </a:lvl8pPr>
             <a:lvl9pPr marL="3657600" indent="0" algn="l">
@@ -13768,9 +13711,6 @@
                 <a:solidFill>
                   <a:schemeClr val="accent6"/>
                 </a:solidFill>
-                <a:latin typeface="Open Sans"/>
-                <a:ea typeface="Open Sans"/>
-                <a:cs typeface="Open Sans"/>
               </a:defRPr>
             </a:lvl9pPr>
           </a:lstStyle>
@@ -13841,13 +13781,13 @@
     </a:clrScheme>
     <a:fontScheme name="Office Theme">
       <a:majorFont>
-        <a:latin typeface="Arial"/>
-        <a:ea typeface="SimSun"/>
+        <a:latin typeface="Arial Black"/>
+        <a:ea typeface="SimHei"/>
         <a:cs typeface="Arial"/>
       </a:majorFont>
       <a:minorFont>
         <a:latin typeface="Arial"/>
-        <a:ea typeface="SimSun"/>
+        <a:ea typeface="Microsoft YaHei"/>
         <a:cs typeface="Arial"/>
       </a:minorFont>
     </a:fontScheme>
@@ -14078,13 +14018,13 @@
     </a:clrScheme>
     <a:fontScheme name="Arial">
       <a:majorFont>
-        <a:latin typeface="Arial"/>
-        <a:ea typeface="Arial"/>
+        <a:latin typeface="Arial Black"/>
+        <a:ea typeface="SimHei"/>
         <a:cs typeface="Arial"/>
       </a:majorFont>
       <a:minorFont>
         <a:latin typeface="Arial"/>
-        <a:ea typeface="Arial"/>
+        <a:ea typeface="Microsoft YaHei"/>
         <a:cs typeface="Arial"/>
       </a:minorFont>
     </a:fontScheme>
